--- a/docs/adaptive_autopilot_research/自动舵自适应算法调研汇报.pptx
+++ b/docs/adaptive_autopilot_research/自动舵自适应算法调研汇报.pptx
@@ -21,6 +21,8 @@
     <p:sldId id="269" r:id="rId20"/>
     <p:sldId id="270" r:id="rId21"/>
     <p:sldId id="271" r:id="rId22"/>
+    <p:sldId id="272" r:id="rId23"/>
+    <p:sldId id="273" r:id="rId24"/>
   </p:sldIdLst>
   <p:sldSz cx="12191695" cy="6858000" type="screen4x3"/>
   <p:notesSz cx="6858000" cy="9144000"/>
@@ -7289,7 +7291,7 @@
                 <a:latin typeface="Noto Sans CJK SC"/>
                 <a:ea typeface="Noto Sans CJK SC"/>
               </a:rPr>
-              <a:t>对本项目的分层建议（P0–P3）</a:t>
+              <a:t>相关产品与专利（一）：公司—产品—专利图谱</a:t>
             </a:r>
           </a:p>
           <a:p>
@@ -7301,7 +7303,7 @@
                 <a:latin typeface="Noto Sans CJK SC"/>
                 <a:ea typeface="Noto Sans CJK SC"/>
               </a:rPr>
-              <a:t>第 13 章 · 按投入产出排序</a:t>
+              <a:t>第 13 章 · 全部 48 件专利逐页核实</a:t>
             </a:r>
           </a:p>
         </p:txBody>
@@ -7345,6 +7347,1429 @@
                 <a:ea typeface="Noto Sans CJK SC"/>
               </a:rPr>
               <a:t>15</a:t>
+            </a:r>
+          </a:p>
+        </p:txBody>
+      </p:sp>
+      <p:graphicFrame>
+        <p:nvGraphicFramePr>
+          <p:cNvPr id="4" name="Table 3"/>
+          <p:cNvGraphicFramePr>
+            <a:graphicFrameLocks noGrp="1"/>
+          </p:cNvGraphicFramePr>
+          <p:nvPr/>
+        </p:nvGraphicFramePr>
+        <p:xfrm>
+          <a:off x="411480" y="1097280"/>
+          <a:ext cx="11384278" cy="5029200"/>
+        </p:xfrm>
+        <a:graphic>
+          <a:graphicData uri="http://schemas.openxmlformats.org/drawingml/2006/table">
+            <a:tbl>
+              <a:tblPr firstRow="1" bandRow="1">
+                <a:tableStyleId>{5C22544A-7EE6-4342-B048-85BDC9FD1C3A}</a:tableStyleId>
+              </a:tblPr>
+              <a:tblGrid>
+                <a:gridCol w="2019791"/>
+                <a:gridCol w="2662452"/>
+                <a:gridCol w="4498626"/>
+                <a:gridCol w="2203409"/>
+              </a:tblGrid>
+              <a:tr h="558800">
+                <a:tc>
+                  <a:txBody>
+                    <a:bodyPr wrap="square"/>
+                    <a:lstStyle/>
+                    <a:p>
+                      <a:pPr algn="ctr"/>
+                      <a:r>
+                        <a:rPr sz="1200" b="1">
+                          <a:solidFill>
+                            <a:srgbClr val="FFFFFF"/>
+                          </a:solidFill>
+                          <a:latin typeface="Noto Sans CJK SC"/>
+                          <a:ea typeface="Noto Sans CJK SC"/>
+                        </a:rPr>
+                        <a:t>公司</a:t>
+                      </a:r>
+                    </a:p>
+                  </a:txBody>
+                  <a:tcPr marL="54864" marR="54864" marT="18288" marB="18288" anchor="ctr">
+                    <a:solidFill>
+                      <a:srgbClr val="1F3864"/>
+                    </a:solidFill>
+                  </a:tcPr>
+                </a:tc>
+                <a:tc>
+                  <a:txBody>
+                    <a:bodyPr wrap="square"/>
+                    <a:lstStyle/>
+                    <a:p>
+                      <a:pPr algn="ctr"/>
+                      <a:r>
+                        <a:rPr sz="1200" b="1">
+                          <a:solidFill>
+                            <a:srgbClr val="FFFFFF"/>
+                          </a:solidFill>
+                          <a:latin typeface="Noto Sans CJK SC"/>
+                          <a:ea typeface="Noto Sans CJK SC"/>
+                        </a:rPr>
+                        <a:t>代表产品</a:t>
+                      </a:r>
+                    </a:p>
+                  </a:txBody>
+                  <a:tcPr marL="54864" marR="54864" marT="18288" marB="18288" anchor="ctr">
+                    <a:solidFill>
+                      <a:srgbClr val="1F3864"/>
+                    </a:solidFill>
+                  </a:tcPr>
+                </a:tc>
+                <a:tc>
+                  <a:txBody>
+                    <a:bodyPr wrap="square"/>
+                    <a:lstStyle/>
+                    <a:p>
+                      <a:pPr algn="ctr"/>
+                      <a:r>
+                        <a:rPr sz="1200" b="1">
+                          <a:solidFill>
+                            <a:srgbClr val="FFFFFF"/>
+                          </a:solidFill>
+                          <a:latin typeface="Noto Sans CJK SC"/>
+                          <a:ea typeface="Noto Sans CJK SC"/>
+                        </a:rPr>
+                        <a:t>代表专利（择要）</a:t>
+                      </a:r>
+                    </a:p>
+                  </a:txBody>
+                  <a:tcPr marL="54864" marR="54864" marT="18288" marB="18288" anchor="ctr">
+                    <a:solidFill>
+                      <a:srgbClr val="1F3864"/>
+                    </a:solidFill>
+                  </a:tcPr>
+                </a:tc>
+                <a:tc>
+                  <a:txBody>
+                    <a:bodyPr wrap="square"/>
+                    <a:lstStyle/>
+                    <a:p>
+                      <a:pPr algn="ctr"/>
+                      <a:r>
+                        <a:rPr sz="1200" b="1">
+                          <a:solidFill>
+                            <a:srgbClr val="FFFFFF"/>
+                          </a:solidFill>
+                          <a:latin typeface="Noto Sans CJK SC"/>
+                          <a:ea typeface="Noto Sans CJK SC"/>
+                        </a:rPr>
+                        <a:t>对应算法主题</a:t>
+                      </a:r>
+                    </a:p>
+                  </a:txBody>
+                  <a:tcPr marL="54864" marR="54864" marT="18288" marB="18288" anchor="ctr">
+                    <a:solidFill>
+                      <a:srgbClr val="1F3864"/>
+                    </a:solidFill>
+                  </a:tcPr>
+                </a:tc>
+              </a:tr>
+              <a:tr h="558800">
+                <a:tc>
+                  <a:txBody>
+                    <a:bodyPr wrap="square"/>
+                    <a:lstStyle/>
+                    <a:p>
+                      <a:pPr algn="ctr"/>
+                      <a:r>
+                        <a:rPr sz="1050" b="0">
+                          <a:solidFill>
+                            <a:srgbClr val="595959"/>
+                          </a:solidFill>
+                          <a:latin typeface="Noto Sans CJK SC"/>
+                          <a:ea typeface="Noto Sans CJK SC"/>
+                        </a:rPr>
+                        <a:t>Sperry Marine</a:t>
+                      </a:r>
+                    </a:p>
+                  </a:txBody>
+                  <a:tcPr marL="54864" marR="54864" marT="18288" marB="18288" anchor="ctr">
+                    <a:solidFill>
+                      <a:srgbClr val="FFFFFF"/>
+                    </a:solidFill>
+                  </a:tcPr>
+                </a:tc>
+                <a:tc>
+                  <a:txBody>
+                    <a:bodyPr wrap="square"/>
+                    <a:lstStyle/>
+                    <a:p>
+                      <a:pPr algn="l"/>
+                      <a:r>
+                        <a:rPr sz="1050" b="0">
+                          <a:solidFill>
+                            <a:srgbClr val="595959"/>
+                          </a:solidFill>
+                          <a:latin typeface="Noto Sans CJK SC"/>
+                          <a:ea typeface="Noto Sans CJK SC"/>
+                        </a:rPr>
+                        <a:t>NAVIPILOT 4000/4500N（self-tuning fully adaptive）</a:t>
+                      </a:r>
+                    </a:p>
+                  </a:txBody>
+                  <a:tcPr marL="54864" marR="54864" marT="18288" marB="18288" anchor="ctr">
+                    <a:solidFill>
+                      <a:srgbClr val="FFFFFF"/>
+                    </a:solidFill>
+                  </a:tcPr>
+                </a:tc>
+                <a:tc>
+                  <a:txBody>
+                    <a:bodyPr wrap="square"/>
+                    <a:lstStyle/>
+                    <a:p>
+                      <a:pPr algn="l"/>
+                      <a:r>
+                        <a:rPr sz="1050" b="0">
+                          <a:solidFill>
+                            <a:srgbClr val="595959"/>
+                          </a:solidFill>
+                          <a:latin typeface="Noto Sans CJK SC"/>
+                          <a:ea typeface="Noto Sans CJK SC"/>
+                        </a:rPr>
+                        <a:t>US4074648A（1978，性能指标 J 寻优）；US4799163A（1989，海况自适应）</a:t>
+                      </a:r>
+                    </a:p>
+                  </a:txBody>
+                  <a:tcPr marL="54864" marR="54864" marT="18288" marB="18288" anchor="ctr">
+                    <a:solidFill>
+                      <a:srgbClr val="FFFFFF"/>
+                    </a:solidFill>
+                  </a:tcPr>
+                </a:tc>
+                <a:tc>
+                  <a:txBody>
+                    <a:bodyPr wrap="square"/>
+                    <a:lstStyle/>
+                    <a:p>
+                      <a:pPr algn="l"/>
+                      <a:r>
+                        <a:rPr sz="1050" b="0">
+                          <a:solidFill>
+                            <a:srgbClr val="595959"/>
+                          </a:solidFill>
+                          <a:latin typeface="Noto Sans CJK SC"/>
+                          <a:ea typeface="Noto Sans CJK SC"/>
+                        </a:rPr>
+                        <a:t>自适应 PID / 海况自适应</a:t>
+                      </a:r>
+                    </a:p>
+                  </a:txBody>
+                  <a:tcPr marL="54864" marR="54864" marT="18288" marB="18288" anchor="ctr">
+                    <a:solidFill>
+                      <a:srgbClr val="FFFFFF"/>
+                    </a:solidFill>
+                  </a:tcPr>
+                </a:tc>
+              </a:tr>
+              <a:tr h="558800">
+                <a:tc>
+                  <a:txBody>
+                    <a:bodyPr wrap="square"/>
+                    <a:lstStyle/>
+                    <a:p>
+                      <a:pPr algn="ctr"/>
+                      <a:r>
+                        <a:rPr sz="1050" b="0">
+                          <a:solidFill>
+                            <a:srgbClr val="595959"/>
+                          </a:solidFill>
+                          <a:latin typeface="Noto Sans CJK SC"/>
+                          <a:ea typeface="Noto Sans CJK SC"/>
+                        </a:rPr>
+                        <a:t>Raytheon Anschütz</a:t>
+                      </a:r>
+                    </a:p>
+                  </a:txBody>
+                  <a:tcPr marL="54864" marR="54864" marT="18288" marB="18288" anchor="ctr">
+                    <a:solidFill>
+                      <a:srgbClr val="EEF3FA"/>
+                    </a:solidFill>
+                  </a:tcPr>
+                </a:tc>
+                <a:tc>
+                  <a:txBody>
+                    <a:bodyPr wrap="square"/>
+                    <a:lstStyle/>
+                    <a:p>
+                      <a:pPr algn="l"/>
+                      <a:r>
+                        <a:rPr sz="1050" b="0">
+                          <a:solidFill>
+                            <a:srgbClr val="595959"/>
+                          </a:solidFill>
+                          <a:latin typeface="Noto Sans CJK SC"/>
+                          <a:ea typeface="Noto Sans CJK SC"/>
+                        </a:rPr>
+                        <a:t>NautoPilot 5000/NX（ECOnomy 模式）</a:t>
+                      </a:r>
+                    </a:p>
+                  </a:txBody>
+                  <a:tcPr marL="54864" marR="54864" marT="18288" marB="18288" anchor="ctr">
+                    <a:solidFill>
+                      <a:srgbClr val="EEF3FA"/>
+                    </a:solidFill>
+                  </a:tcPr>
+                </a:tc>
+                <a:tc>
+                  <a:txBody>
+                    <a:bodyPr wrap="square"/>
+                    <a:lstStyle/>
+                    <a:p>
+                      <a:pPr algn="l"/>
+                      <a:r>
+                        <a:rPr sz="1050" b="0">
+                          <a:solidFill>
+                            <a:srgbClr val="595959"/>
+                          </a:solidFill>
+                          <a:latin typeface="Noto Sans CJK SC"/>
+                          <a:ea typeface="Noto Sans CJK SC"/>
+                        </a:rPr>
+                        <a:t>US5179905A（1993，按横摇频率自适应微分阻尼）；US5331558A（1994，自适应死区）</a:t>
+                      </a:r>
+                    </a:p>
+                  </a:txBody>
+                  <a:tcPr marL="54864" marR="54864" marT="18288" marB="18288" anchor="ctr">
+                    <a:solidFill>
+                      <a:srgbClr val="EEF3FA"/>
+                    </a:solidFill>
+                  </a:tcPr>
+                </a:tc>
+                <a:tc>
+                  <a:txBody>
+                    <a:bodyPr wrap="square"/>
+                    <a:lstStyle/>
+                    <a:p>
+                      <a:pPr algn="l"/>
+                      <a:r>
+                        <a:rPr sz="1050" b="0">
+                          <a:solidFill>
+                            <a:srgbClr val="595959"/>
+                          </a:solidFill>
+                          <a:latin typeface="Noto Sans CJK SC"/>
+                          <a:ea typeface="Noto Sans CJK SC"/>
+                        </a:rPr>
+                        <a:t>波浪滤波 / 节能</a:t>
+                      </a:r>
+                    </a:p>
+                  </a:txBody>
+                  <a:tcPr marL="54864" marR="54864" marT="18288" marB="18288" anchor="ctr">
+                    <a:solidFill>
+                      <a:srgbClr val="EEF3FA"/>
+                    </a:solidFill>
+                  </a:tcPr>
+                </a:tc>
+              </a:tr>
+              <a:tr h="558800">
+                <a:tc>
+                  <a:txBody>
+                    <a:bodyPr wrap="square"/>
+                    <a:lstStyle/>
+                    <a:p>
+                      <a:pPr algn="ctr"/>
+                      <a:r>
+                        <a:rPr sz="1050" b="0">
+                          <a:solidFill>
+                            <a:srgbClr val="595959"/>
+                          </a:solidFill>
+                          <a:latin typeface="Noto Sans CJK SC"/>
+                          <a:ea typeface="Noto Sans CJK SC"/>
+                        </a:rPr>
+                        <a:t>Tokyo Keiki 东京计器</a:t>
+                      </a:r>
+                    </a:p>
+                  </a:txBody>
+                  <a:tcPr marL="54864" marR="54864" marT="18288" marB="18288" anchor="ctr">
+                    <a:solidFill>
+                      <a:srgbClr val="FFFFFF"/>
+                    </a:solidFill>
+                  </a:tcPr>
+                </a:tc>
+                <a:tc>
+                  <a:txBody>
+                    <a:bodyPr wrap="square"/>
+                    <a:lstStyle/>
+                    <a:p>
+                      <a:pPr algn="l"/>
+                      <a:r>
+                        <a:rPr sz="1050" b="0">
+                          <a:solidFill>
+                            <a:srgbClr val="595959"/>
+                          </a:solidFill>
+                          <a:latin typeface="Noto Sans CJK SC"/>
+                          <a:ea typeface="Noto Sans CJK SC"/>
+                        </a:rPr>
+                        <a:t>PR-9000（NCT 自适应、ACE 节能）</a:t>
+                      </a:r>
+                    </a:p>
+                  </a:txBody>
+                  <a:tcPr marL="54864" marR="54864" marT="18288" marB="18288" anchor="ctr">
+                    <a:solidFill>
+                      <a:srgbClr val="FFFFFF"/>
+                    </a:solidFill>
+                  </a:tcPr>
+                </a:tc>
+                <a:tc>
+                  <a:txBody>
+                    <a:bodyPr wrap="square"/>
+                    <a:lstStyle/>
+                    <a:p>
+                      <a:pPr algn="l"/>
+                      <a:r>
+                        <a:rPr sz="1050" b="0">
+                          <a:solidFill>
+                            <a:srgbClr val="595959"/>
+                          </a:solidFill>
+                          <a:latin typeface="Noto Sans CJK SC"/>
+                          <a:ea typeface="Noto Sans CJK SC"/>
+                        </a:rPr>
+                        <a:t>US3505577A（1970，恶劣海况自动降灵敏度，ECO 鼻祖）；US3739251A（1973，自动气象调节）</a:t>
+                      </a:r>
+                    </a:p>
+                  </a:txBody>
+                  <a:tcPr marL="54864" marR="54864" marT="18288" marB="18288" anchor="ctr">
+                    <a:solidFill>
+                      <a:srgbClr val="FFFFFF"/>
+                    </a:solidFill>
+                  </a:tcPr>
+                </a:tc>
+                <a:tc>
+                  <a:txBody>
+                    <a:bodyPr wrap="square"/>
+                    <a:lstStyle/>
+                    <a:p>
+                      <a:pPr algn="l"/>
+                      <a:r>
+                        <a:rPr sz="1050" b="0">
+                          <a:solidFill>
+                            <a:srgbClr val="595959"/>
+                          </a:solidFill>
+                          <a:latin typeface="Noto Sans CJK SC"/>
+                          <a:ea typeface="Noto Sans CJK SC"/>
+                        </a:rPr>
+                        <a:t>海况自适应 / 节能</a:t>
+                      </a:r>
+                    </a:p>
+                  </a:txBody>
+                  <a:tcPr marL="54864" marR="54864" marT="18288" marB="18288" anchor="ctr">
+                    <a:solidFill>
+                      <a:srgbClr val="FFFFFF"/>
+                    </a:solidFill>
+                  </a:tcPr>
+                </a:tc>
+              </a:tr>
+              <a:tr h="558800">
+                <a:tc>
+                  <a:txBody>
+                    <a:bodyPr wrap="square"/>
+                    <a:lstStyle/>
+                    <a:p>
+                      <a:pPr algn="ctr"/>
+                      <a:r>
+                        <a:rPr sz="1050" b="0">
+                          <a:solidFill>
+                            <a:srgbClr val="595959"/>
+                          </a:solidFill>
+                          <a:latin typeface="Noto Sans CJK SC"/>
+                          <a:ea typeface="Noto Sans CJK SC"/>
+                        </a:rPr>
+                        <a:t>横河 YDK</a:t>
+                      </a:r>
+                    </a:p>
+                  </a:txBody>
+                  <a:tcPr marL="54864" marR="54864" marT="18288" marB="18288" anchor="ctr">
+                    <a:solidFill>
+                      <a:srgbClr val="EEF3FA"/>
+                    </a:solidFill>
+                  </a:tcPr>
+                </a:tc>
+                <a:tc>
+                  <a:txBody>
+                    <a:bodyPr wrap="square"/>
+                    <a:lstStyle/>
+                    <a:p>
+                      <a:pPr algn="l"/>
+                      <a:r>
+                        <a:rPr sz="1050" b="0">
+                          <a:solidFill>
+                            <a:srgbClr val="595959"/>
+                          </a:solidFill>
+                          <a:latin typeface="Noto Sans CJK SC"/>
+                          <a:ea typeface="Noto Sans CJK SC"/>
+                        </a:rPr>
+                        <a:t>PT900A（BNAAC 自校正）</a:t>
+                      </a:r>
+                    </a:p>
+                  </a:txBody>
+                  <a:tcPr marL="54864" marR="54864" marT="18288" marB="18288" anchor="ctr">
+                    <a:solidFill>
+                      <a:srgbClr val="EEF3FA"/>
+                    </a:solidFill>
+                  </a:tcPr>
+                </a:tc>
+                <a:tc>
+                  <a:txBody>
+                    <a:bodyPr wrap="square"/>
+                    <a:lstStyle/>
+                    <a:p>
+                      <a:pPr algn="l"/>
+                      <a:r>
+                        <a:rPr sz="1050" b="0">
+                          <a:solidFill>
+                            <a:srgbClr val="595959"/>
+                          </a:solidFill>
+                          <a:latin typeface="Noto Sans CJK SC"/>
+                          <a:ea typeface="Noto Sans CJK SC"/>
+                        </a:rPr>
+                        <a:t>JP2011042284A / JP2014136509A（批量区间更新 AR 模型 + 最优增益，与 BNAAC 官方原理逐点对应）</a:t>
+                      </a:r>
+                    </a:p>
+                  </a:txBody>
+                  <a:tcPr marL="54864" marR="54864" marT="18288" marB="18288" anchor="ctr">
+                    <a:solidFill>
+                      <a:srgbClr val="EEF3FA"/>
+                    </a:solidFill>
+                  </a:tcPr>
+                </a:tc>
+                <a:tc>
+                  <a:txBody>
+                    <a:bodyPr wrap="square"/>
+                    <a:lstStyle/>
+                    <a:p>
+                      <a:pPr algn="l"/>
+                      <a:r>
+                        <a:rPr sz="1050" b="0">
+                          <a:solidFill>
+                            <a:srgbClr val="595959"/>
+                          </a:solidFill>
+                          <a:latin typeface="Noto Sans CJK SC"/>
+                          <a:ea typeface="Noto Sans CJK SC"/>
+                        </a:rPr>
+                        <a:t>STR/自校正、舵减摇</a:t>
+                      </a:r>
+                    </a:p>
+                  </a:txBody>
+                  <a:tcPr marL="54864" marR="54864" marT="18288" marB="18288" anchor="ctr">
+                    <a:solidFill>
+                      <a:srgbClr val="EEF3FA"/>
+                    </a:solidFill>
+                  </a:tcPr>
+                </a:tc>
+              </a:tr>
+              <a:tr h="558800">
+                <a:tc>
+                  <a:txBody>
+                    <a:bodyPr wrap="square"/>
+                    <a:lstStyle/>
+                    <a:p>
+                      <a:pPr algn="ctr"/>
+                      <a:r>
+                        <a:rPr sz="1050" b="0">
+                          <a:solidFill>
+                            <a:srgbClr val="595959"/>
+                          </a:solidFill>
+                          <a:latin typeface="Noto Sans CJK SC"/>
+                          <a:ea typeface="Noto Sans CJK SC"/>
+                        </a:rPr>
+                        <a:t>Furuno 古野</a:t>
+                      </a:r>
+                    </a:p>
+                  </a:txBody>
+                  <a:tcPr marL="54864" marR="54864" marT="18288" marB="18288" anchor="ctr">
+                    <a:solidFill>
+                      <a:srgbClr val="FFFFFF"/>
+                    </a:solidFill>
+                  </a:tcPr>
+                </a:tc>
+                <a:tc>
+                  <a:txBody>
+                    <a:bodyPr wrap="square"/>
+                    <a:lstStyle/>
+                    <a:p>
+                      <a:pPr algn="l"/>
+                      <a:r>
+                        <a:rPr sz="1050" b="0">
+                          <a:solidFill>
+                            <a:srgbClr val="595959"/>
+                          </a:solidFill>
+                          <a:latin typeface="Noto Sans CJK SC"/>
+                          <a:ea typeface="Noto Sans CJK SC"/>
+                        </a:rPr>
+                        <a:t>NavPilot 系列（self-learning）</a:t>
+                      </a:r>
+                    </a:p>
+                  </a:txBody>
+                  <a:tcPr marL="54864" marR="54864" marT="18288" marB="18288" anchor="ctr">
+                    <a:solidFill>
+                      <a:srgbClr val="FFFFFF"/>
+                    </a:solidFill>
+                  </a:tcPr>
+                </a:tc>
+                <a:tc>
+                  <a:txBody>
+                    <a:bodyPr wrap="square"/>
+                    <a:lstStyle/>
+                    <a:p>
+                      <a:pPr algn="l"/>
+                      <a:r>
+                        <a:rPr sz="1050" b="0">
+                          <a:solidFill>
+                            <a:srgbClr val="595959"/>
+                          </a:solidFill>
+                          <a:latin typeface="Noto Sans CJK SC"/>
+                          <a:ea typeface="Noto Sans CJK SC"/>
+                        </a:rPr>
+                        <a:t>US9725151B2（免舵角反馈）；US11383813B2（基于 K/T 的前馈转向）</a:t>
+                      </a:r>
+                    </a:p>
+                  </a:txBody>
+                  <a:tcPr marL="54864" marR="54864" marT="18288" marB="18288" anchor="ctr">
+                    <a:solidFill>
+                      <a:srgbClr val="FFFFFF"/>
+                    </a:solidFill>
+                  </a:tcPr>
+                </a:tc>
+                <a:tc>
+                  <a:txBody>
+                    <a:bodyPr wrap="square"/>
+                    <a:lstStyle/>
+                    <a:p>
+                      <a:pPr algn="l"/>
+                      <a:r>
+                        <a:rPr sz="1050" b="0">
+                          <a:solidFill>
+                            <a:srgbClr val="595959"/>
+                          </a:solidFill>
+                          <a:latin typeface="Noto Sans CJK SC"/>
+                          <a:ea typeface="Noto Sans CJK SC"/>
+                        </a:rPr>
+                        <a:t>自适应 PID / 海况自适应</a:t>
+                      </a:r>
+                    </a:p>
+                  </a:txBody>
+                  <a:tcPr marL="54864" marR="54864" marT="18288" marB="18288" anchor="ctr">
+                    <a:solidFill>
+                      <a:srgbClr val="FFFFFF"/>
+                    </a:solidFill>
+                  </a:tcPr>
+                </a:tc>
+              </a:tr>
+              <a:tr h="558800">
+                <a:tc>
+                  <a:txBody>
+                    <a:bodyPr wrap="square"/>
+                    <a:lstStyle/>
+                    <a:p>
+                      <a:pPr algn="ctr"/>
+                      <a:r>
+                        <a:rPr sz="1050" b="0">
+                          <a:solidFill>
+                            <a:srgbClr val="595959"/>
+                          </a:solidFill>
+                          <a:latin typeface="Noto Sans CJK SC"/>
+                          <a:ea typeface="Noto Sans CJK SC"/>
+                        </a:rPr>
+                        <a:t>Garmin</a:t>
+                      </a:r>
+                    </a:p>
+                  </a:txBody>
+                  <a:tcPr marL="54864" marR="54864" marT="18288" marB="18288" anchor="ctr">
+                    <a:solidFill>
+                      <a:srgbClr val="EEF3FA"/>
+                    </a:solidFill>
+                  </a:tcPr>
+                </a:tc>
+                <a:tc>
+                  <a:txBody>
+                    <a:bodyPr wrap="square"/>
+                    <a:lstStyle/>
+                    <a:p>
+                      <a:pPr algn="l"/>
+                      <a:r>
+                        <a:rPr sz="1050" b="0">
+                          <a:solidFill>
+                            <a:srgbClr val="595959"/>
+                          </a:solidFill>
+                          <a:latin typeface="Noto Sans CJK SC"/>
+                          <a:ea typeface="Noto Sans CJK SC"/>
+                        </a:rPr>
+                        <a:t>GHP / Reactor（Shadow Drive）</a:t>
+                      </a:r>
+                    </a:p>
+                  </a:txBody>
+                  <a:tcPr marL="54864" marR="54864" marT="18288" marB="18288" anchor="ctr">
+                    <a:solidFill>
+                      <a:srgbClr val="EEF3FA"/>
+                    </a:solidFill>
+                  </a:tcPr>
+                </a:tc>
+                <a:tc>
+                  <a:txBody>
+                    <a:bodyPr wrap="square"/>
+                    <a:lstStyle/>
+                    <a:p>
+                      <a:pPr algn="l"/>
+                      <a:r>
+                        <a:rPr sz="1050" b="0">
+                          <a:solidFill>
+                            <a:srgbClr val="595959"/>
+                          </a:solidFill>
+                          <a:latin typeface="Noto Sans CJK SC"/>
+                          <a:ea typeface="Noto Sans CJK SC"/>
+                        </a:rPr>
+                        <a:t>US20190204837A1（舵轮脱开）；US12632049（2026，按船动力学与风流条件的路径级自适应）</a:t>
+                      </a:r>
+                    </a:p>
+                  </a:txBody>
+                  <a:tcPr marL="54864" marR="54864" marT="18288" marB="18288" anchor="ctr">
+                    <a:solidFill>
+                      <a:srgbClr val="EEF3FA"/>
+                    </a:solidFill>
+                  </a:tcPr>
+                </a:tc>
+                <a:tc>
+                  <a:txBody>
+                    <a:bodyPr wrap="square"/>
+                    <a:lstStyle/>
+                    <a:p>
+                      <a:pPr algn="l"/>
+                      <a:r>
+                        <a:rPr sz="1050" b="0">
+                          <a:solidFill>
+                            <a:srgbClr val="595959"/>
+                          </a:solidFill>
+                          <a:latin typeface="Noto Sans CJK SC"/>
+                          <a:ea typeface="Noto Sans CJK SC"/>
+                        </a:rPr>
+                        <a:t>自适应 PID / 航迹</a:t>
+                      </a:r>
+                    </a:p>
+                  </a:txBody>
+                  <a:tcPr marL="54864" marR="54864" marT="18288" marB="18288" anchor="ctr">
+                    <a:solidFill>
+                      <a:srgbClr val="EEF3FA"/>
+                    </a:solidFill>
+                  </a:tcPr>
+                </a:tc>
+              </a:tr>
+              <a:tr h="558800">
+                <a:tc>
+                  <a:txBody>
+                    <a:bodyPr wrap="square"/>
+                    <a:lstStyle/>
+                    <a:p>
+                      <a:pPr algn="ctr"/>
+                      <a:r>
+                        <a:rPr sz="1050" b="0">
+                          <a:solidFill>
+                            <a:srgbClr val="595959"/>
+                          </a:solidFill>
+                          <a:latin typeface="Noto Sans CJK SC"/>
+                          <a:ea typeface="Noto Sans CJK SC"/>
+                        </a:rPr>
+                        <a:t>海兰信</a:t>
+                      </a:r>
+                    </a:p>
+                  </a:txBody>
+                  <a:tcPr marL="54864" marR="54864" marT="18288" marB="18288" anchor="ctr">
+                    <a:solidFill>
+                      <a:srgbClr val="FFFFFF"/>
+                    </a:solidFill>
+                  </a:tcPr>
+                </a:tc>
+                <a:tc>
+                  <a:txBody>
+                    <a:bodyPr wrap="square"/>
+                    <a:lstStyle/>
+                    <a:p>
+                      <a:pPr algn="l"/>
+                      <a:r>
+                        <a:rPr sz="1050" b="0">
+                          <a:solidFill>
+                            <a:srgbClr val="595959"/>
+                          </a:solidFill>
+                          <a:latin typeface="Noto Sans CJK SC"/>
+                          <a:ea typeface="Noto Sans CJK SC"/>
+                        </a:rPr>
+                        <a:t>SCS 操舵仪（上市文件列明核心专利）</a:t>
+                      </a:r>
+                    </a:p>
+                  </a:txBody>
+                  <a:tcPr marL="54864" marR="54864" marT="18288" marB="18288" anchor="ctr">
+                    <a:solidFill>
+                      <a:srgbClr val="FFFFFF"/>
+                    </a:solidFill>
+                  </a:tcPr>
+                </a:tc>
+                <a:tc>
+                  <a:txBody>
+                    <a:bodyPr wrap="square"/>
+                    <a:lstStyle/>
+                    <a:p>
+                      <a:pPr algn="l"/>
+                      <a:r>
+                        <a:rPr sz="1050" b="0">
+                          <a:solidFill>
+                            <a:srgbClr val="595959"/>
+                          </a:solidFill>
+                          <a:latin typeface="Noto Sans CJK SC"/>
+                          <a:ea typeface="Noto Sans CJK SC"/>
+                        </a:rPr>
+                        <a:t>CN101281409A/B（双 CAN 冗余自动操舵仪）</a:t>
+                      </a:r>
+                    </a:p>
+                  </a:txBody>
+                  <a:tcPr marL="54864" marR="54864" marT="18288" marB="18288" anchor="ctr">
+                    <a:solidFill>
+                      <a:srgbClr val="FFFFFF"/>
+                    </a:solidFill>
+                  </a:tcPr>
+                </a:tc>
+                <a:tc>
+                  <a:txBody>
+                    <a:bodyPr wrap="square"/>
+                    <a:lstStyle/>
+                    <a:p>
+                      <a:pPr algn="l"/>
+                      <a:r>
+                        <a:rPr sz="1050" b="0">
+                          <a:solidFill>
+                            <a:srgbClr val="595959"/>
+                          </a:solidFill>
+                          <a:latin typeface="Noto Sans CJK SC"/>
+                          <a:ea typeface="Noto Sans CJK SC"/>
+                        </a:rPr>
+                        <a:t>系统架构</a:t>
+                      </a:r>
+                    </a:p>
+                  </a:txBody>
+                  <a:tcPr marL="54864" marR="54864" marT="18288" marB="18288" anchor="ctr">
+                    <a:solidFill>
+                      <a:srgbClr val="FFFFFF"/>
+                    </a:solidFill>
+                  </a:tcPr>
+                </a:tc>
+              </a:tr>
+              <a:tr h="558800">
+                <a:tc>
+                  <a:txBody>
+                    <a:bodyPr wrap="square"/>
+                    <a:lstStyle/>
+                    <a:p>
+                      <a:pPr algn="ctr"/>
+                      <a:r>
+                        <a:rPr sz="1050" b="0">
+                          <a:solidFill>
+                            <a:srgbClr val="595959"/>
+                          </a:solidFill>
+                          <a:latin typeface="Noto Sans CJK SC"/>
+                          <a:ea typeface="Noto Sans CJK SC"/>
+                        </a:rPr>
+                        <a:t>中国高校/研究所</a:t>
+                      </a:r>
+                    </a:p>
+                  </a:txBody>
+                  <a:tcPr marL="54864" marR="54864" marT="18288" marB="18288" anchor="ctr">
+                    <a:solidFill>
+                      <a:srgbClr val="EEF3FA"/>
+                    </a:solidFill>
+                  </a:tcPr>
+                </a:tc>
+                <a:tc>
+                  <a:txBody>
+                    <a:bodyPr wrap="square"/>
+                    <a:lstStyle/>
+                    <a:p>
+                      <a:pPr algn="l"/>
+                      <a:r>
+                        <a:rPr sz="1050" b="0">
+                          <a:solidFill>
+                            <a:srgbClr val="595959"/>
+                          </a:solidFill>
+                          <a:latin typeface="Noto Sans CJK SC"/>
+                          <a:ea typeface="Noto Sans CJK SC"/>
+                        </a:rPr>
+                        <a:t>多为算法专利，未见对应商用产品</a:t>
+                      </a:r>
+                    </a:p>
+                  </a:txBody>
+                  <a:tcPr marL="54864" marR="54864" marT="18288" marB="18288" anchor="ctr">
+                    <a:solidFill>
+                      <a:srgbClr val="EEF3FA"/>
+                    </a:solidFill>
+                  </a:tcPr>
+                </a:tc>
+                <a:tc>
+                  <a:txBody>
+                    <a:bodyPr wrap="square"/>
+                    <a:lstStyle/>
+                    <a:p>
+                      <a:pPr algn="l"/>
+                      <a:r>
+                        <a:rPr sz="1050" b="0">
+                          <a:solidFill>
+                            <a:srgbClr val="595959"/>
+                          </a:solidFill>
+                          <a:latin typeface="Noto Sans CJK SC"/>
+                          <a:ea typeface="Noto Sans CJK SC"/>
+                        </a:rPr>
+                        <a:t>CN101615000A（NN 逆）、CN100589055C（模糊 NN+滑模）、CN114879671B（RL-MPC）等</a:t>
+                      </a:r>
+                    </a:p>
+                  </a:txBody>
+                  <a:tcPr marL="54864" marR="54864" marT="18288" marB="18288" anchor="ctr">
+                    <a:solidFill>
+                      <a:srgbClr val="EEF3FA"/>
+                    </a:solidFill>
+                  </a:tcPr>
+                </a:tc>
+                <a:tc>
+                  <a:txBody>
+                    <a:bodyPr wrap="square"/>
+                    <a:lstStyle/>
+                    <a:p>
+                      <a:pPr algn="l"/>
+                      <a:r>
+                        <a:rPr sz="1050" b="0">
+                          <a:solidFill>
+                            <a:srgbClr val="595959"/>
+                          </a:solidFill>
+                          <a:latin typeface="Noto Sans CJK SC"/>
+                          <a:ea typeface="Noto Sans CJK SC"/>
+                        </a:rPr>
+                        <a:t>模糊 / NN / 滑模 / RL</a:t>
+                      </a:r>
+                    </a:p>
+                  </a:txBody>
+                  <a:tcPr marL="54864" marR="54864" marT="18288" marB="18288" anchor="ctr">
+                    <a:solidFill>
+                      <a:srgbClr val="EEF3FA"/>
+                    </a:solidFill>
+                  </a:tcPr>
+                </a:tc>
+              </a:tr>
+            </a:tbl>
+          </a:graphicData>
+        </a:graphic>
+      </p:graphicFrame>
+      <p:sp>
+        <p:nvSpPr>
+          <p:cNvPr id="5" name="TextBox 4"/>
+          <p:cNvSpPr txBox="1"/>
+          <p:nvPr/>
+        </p:nvSpPr>
+        <p:spPr>
+          <a:xfrm>
+            <a:off x="411480" y="6263640"/>
+            <a:ext cx="11338560" cy="457200"/>
+          </a:xfrm>
+          <a:prstGeom prst="rect">
+            <a:avLst/>
+          </a:prstGeom>
+          <a:noFill/>
+        </p:spPr>
+        <p:txBody>
+          <a:bodyPr wrap="square" anchor="t">
+            <a:spAutoFit/>
+          </a:bodyPr>
+          <a:lstStyle/>
+          <a:p>
+            <a:pPr algn="l">
+              <a:lnSpc>
+                <a:spcPct val="100000"/>
+              </a:lnSpc>
+              <a:spcAft>
+                <a:spcPts val="600"/>
+              </a:spcAft>
+            </a:pPr>
+            <a:r>
+              <a:rPr sz="1100" b="0">
+                <a:solidFill>
+                  <a:srgbClr val="595959"/>
+                </a:solidFill>
+                <a:latin typeface="Noto Sans CJK SC"/>
+                <a:ea typeface="Noto Sans CJK SC"/>
+              </a:rPr>
+              <a:t>另核实：Kongsberg、Anschütz 近代产品、东京计器 NCT 等未检出可核实公开专利；荷兰 ASSA、美国海军 RRS、ABB-Fossen WOPC 等谱系详见文档。</a:t>
+            </a:r>
+          </a:p>
+        </p:txBody>
+      </p:sp>
+    </p:spTree>
+  </p:cSld>
+  <p:clrMapOvr>
+    <a:masterClrMapping/>
+  </p:clrMapOvr>
+</p:sld>
+</file>
+
+<file path=ppt/slides/slide16.xml><?xml version="1.0" encoding="utf-8"?>
+<p:sld xmlns:a="http://schemas.openxmlformats.org/drawingml/2006/main" xmlns:p="http://schemas.openxmlformats.org/presentationml/2006/main" xmlns:r="http://schemas.openxmlformats.org/officeDocument/2006/relationships">
+  <p:cSld>
+    <p:spTree>
+      <p:nvGrpSpPr>
+        <p:cNvPr id="1" name=""/>
+        <p:cNvGrpSpPr/>
+        <p:nvPr/>
+      </p:nvGrpSpPr>
+      <p:grpSpPr/>
+      <p:sp>
+        <p:nvSpPr>
+          <p:cNvPr id="2" name="Rectangle 1"/>
+          <p:cNvSpPr/>
+          <p:nvPr/>
+        </p:nvSpPr>
+        <p:spPr>
+          <a:xfrm>
+            <a:off x="0" y="0"/>
+            <a:ext cx="12191695" cy="841248"/>
+          </a:xfrm>
+          <a:prstGeom prst="rect">
+            <a:avLst/>
+          </a:prstGeom>
+          <a:solidFill>
+            <a:srgbClr val="1F3864"/>
+          </a:solidFill>
+          <a:ln>
+            <a:noFill/>
+          </a:ln>
+          <a:effectLst/>
+        </p:spPr>
+        <p:style>
+          <a:lnRef idx="1">
+            <a:schemeClr val="accent1"/>
+          </a:lnRef>
+          <a:fillRef idx="3">
+            <a:schemeClr val="accent1"/>
+          </a:fillRef>
+          <a:effectRef idx="2">
+            <a:schemeClr val="accent1"/>
+          </a:effectRef>
+          <a:fontRef idx="minor">
+            <a:schemeClr val="lt1"/>
+          </a:fontRef>
+        </p:style>
+        <p:txBody>
+          <a:bodyPr rtlCol="0" anchor="ctr" lIns="411480" tIns="91440" wrap="square"/>
+          <a:lstStyle/>
+          <a:p>
+            <a:pPr algn="ctr"/>
+            <a:r>
+              <a:rPr sz="2600" b="1">
+                <a:solidFill>
+                  <a:srgbClr val="FFFFFF"/>
+                </a:solidFill>
+                <a:latin typeface="Noto Sans CJK SC"/>
+                <a:ea typeface="Noto Sans CJK SC"/>
+              </a:rPr>
+              <a:t>相关产品与专利（二）：关键洞察</a:t>
+            </a:r>
+          </a:p>
+          <a:p>
+            <a:r>
+              <a:rPr sz="1200" b="0">
+                <a:solidFill>
+                  <a:srgbClr val="BDD0EA"/>
+                </a:solidFill>
+                <a:latin typeface="Noto Sans CJK SC"/>
+                <a:ea typeface="Noto Sans CJK SC"/>
+              </a:rPr>
+              <a:t>第 13 章 · 专利视角下的自适应自动舵产业格局</a:t>
+            </a:r>
+          </a:p>
+        </p:txBody>
+      </p:sp>
+      <p:sp>
+        <p:nvSpPr>
+          <p:cNvPr id="3" name="TextBox 2"/>
+          <p:cNvSpPr txBox="1"/>
+          <p:nvPr/>
+        </p:nvSpPr>
+        <p:spPr>
+          <a:xfrm>
+            <a:off x="11277295" y="6473952"/>
+            <a:ext cx="731520" cy="320040"/>
+          </a:xfrm>
+          <a:prstGeom prst="rect">
+            <a:avLst/>
+          </a:prstGeom>
+          <a:noFill/>
+        </p:spPr>
+        <p:txBody>
+          <a:bodyPr wrap="square" anchor="t">
+            <a:spAutoFit/>
+          </a:bodyPr>
+          <a:lstStyle/>
+          <a:p>
+            <a:pPr algn="r">
+              <a:lnSpc>
+                <a:spcPct val="100000"/>
+              </a:lnSpc>
+              <a:spcAft>
+                <a:spcPts val="600"/>
+              </a:spcAft>
+            </a:pPr>
+            <a:r>
+              <a:rPr sz="1100" b="0">
+                <a:solidFill>
+                  <a:srgbClr val="595959"/>
+                </a:solidFill>
+                <a:latin typeface="Noto Sans CJK SC"/>
+                <a:ea typeface="Noto Sans CJK SC"/>
+              </a:rPr>
+              <a:t>16</a:t>
+            </a:r>
+          </a:p>
+        </p:txBody>
+      </p:sp>
+      <p:sp>
+        <p:nvSpPr>
+          <p:cNvPr id="4" name="TextBox 3"/>
+          <p:cNvSpPr txBox="1"/>
+          <p:nvPr/>
+        </p:nvSpPr>
+        <p:spPr>
+          <a:xfrm>
+            <a:off x="411480" y="1143000"/>
+            <a:ext cx="11338560" cy="4206240"/>
+          </a:xfrm>
+          <a:prstGeom prst="rect">
+            <a:avLst/>
+          </a:prstGeom>
+          <a:noFill/>
+        </p:spPr>
+        <p:txBody>
+          <a:bodyPr wrap="square" anchor="t">
+            <a:spAutoFit/>
+          </a:bodyPr>
+          <a:lstStyle/>
+          <a:p>
+            <a:pPr algn="l">
+              <a:lnSpc>
+                <a:spcPct val="105000"/>
+              </a:lnSpc>
+              <a:spcAft>
+                <a:spcPts val="1200"/>
+              </a:spcAft>
+            </a:pPr>
+            <a:r>
+              <a:rPr sz="1400" b="1">
+                <a:solidFill>
+                  <a:srgbClr val="1F3864"/>
+                </a:solidFill>
+                <a:latin typeface="Noto Sans CJK SC"/>
+                <a:ea typeface="Noto Sans CJK SC"/>
+              </a:rPr>
+              <a:t>▪ 专利谱系与学术谱系同构互证：</a:t>
+            </a:r>
+            <a:r>
+              <a:rPr sz="1400" b="0">
+                <a:solidFill>
+                  <a:srgbClr val="595959"/>
+                </a:solidFill>
+                <a:latin typeface="Noto Sans CJK SC"/>
+                <a:ea typeface="Noto Sans CJK SC"/>
+              </a:rPr>
+              <a:t>Sperry 1978 年 J 寻优自适应（比 MRAC 论文更早、以节油为目标）→ 东京计器 1967/1973 海况自适应（恶劣海况自动降灵敏度、自动气象调节）→ 横河 YDK BNAAC（大津学派 STR/LQG 思想的产品化）→ Garmin 2026 路径级自适应——与第 1–3 章 MRAC→STR→增益调度+自适应 PID 的学术演进完全对应</a:t>
+            </a:r>
+          </a:p>
+          <a:p>
+            <a:pPr algn="l">
+              <a:lnSpc>
+                <a:spcPct val="105000"/>
+              </a:lnSpc>
+              <a:spcAft>
+                <a:spcPts val="1200"/>
+              </a:spcAft>
+            </a:pPr>
+            <a:r>
+              <a:rPr sz="1400" b="1">
+                <a:solidFill>
+                  <a:srgbClr val="1F3864"/>
+                </a:solidFill>
+                <a:latin typeface="Noto Sans CJK SC"/>
+                <a:ea typeface="Noto Sans CJK SC"/>
+              </a:rPr>
+              <a:t>▪ 厂商核心算法多以商业秘密保护：</a:t>
+            </a:r>
+            <a:r>
+              <a:rPr sz="1400" b="0">
+                <a:solidFill>
+                  <a:srgbClr val="595959"/>
+                </a:solidFill>
+                <a:latin typeface="Noto Sans CJK SC"/>
+                <a:ea typeface="Noto Sans CJK SC"/>
+              </a:rPr>
+              <a:t>Kongsberg（K-Bridge 宣称 self-adapting）、Anschütz 近代 NautoPilot、东京计器 NCT 均未检出公开专利——公开专利更多落在系统架构、模式切换与外围功能上</a:t>
+            </a:r>
+          </a:p>
+          <a:p>
+            <a:pPr algn="l">
+              <a:lnSpc>
+                <a:spcPct val="105000"/>
+              </a:lnSpc>
+              <a:spcAft>
+                <a:spcPts val="1200"/>
+              </a:spcAft>
+            </a:pPr>
+            <a:r>
+              <a:rPr sz="1400" b="1">
+                <a:solidFill>
+                  <a:srgbClr val="1F3864"/>
+                </a:solidFill>
+                <a:latin typeface="Noto Sans CJK SC"/>
+                <a:ea typeface="Noto Sans CJK SC"/>
+              </a:rPr>
+              <a:t>▪ 中国高校专利覆盖最全但与产品脱节：</a:t>
+            </a:r>
+            <a:r>
+              <a:rPr sz="1400" b="0">
+                <a:solidFill>
+                  <a:srgbClr val="595959"/>
+                </a:solidFill>
+                <a:latin typeface="Noto Sans CJK SC"/>
+                <a:ea typeface="Noto Sans CJK SC"/>
+              </a:rPr>
+              <a:t>模糊、NN、滑模、LQG、RL 均有算法专利，但除海兰信 SCS 操舵仪外均未对应商用产品；欧美日厂商相反——产品有明确自适应宣称，专利多在早期或外围</a:t>
+            </a:r>
+          </a:p>
+          <a:p>
+            <a:pPr algn="l">
+              <a:lnSpc>
+                <a:spcPct val="105000"/>
+              </a:lnSpc>
+              <a:spcAft>
+                <a:spcPts val="1200"/>
+              </a:spcAft>
+            </a:pPr>
+            <a:r>
+              <a:rPr sz="1400" b="1">
+                <a:solidFill>
+                  <a:srgbClr val="1F3864"/>
+                </a:solidFill>
+                <a:latin typeface="Noto Sans CJK SC"/>
+                <a:ea typeface="Noto Sans CJK SC"/>
+              </a:rPr>
+              <a:t>▪ 调研可信度：</a:t>
+            </a:r>
+            <a:r>
+              <a:rPr sz="1400" b="0">
+                <a:solidFill>
+                  <a:srgbClr val="595959"/>
+                </a:solidFill>
+                <a:latin typeface="Noto Sans CJK SC"/>
+                <a:ea typeface="Noto Sans CJK SC"/>
+              </a:rPr>
+              <a:t>全部 48 件专利逐页打开官方/准官方全文源核实（公开号、申请人、年份、摘要一致才收录）；检索不到的厂商如实标注“未检出”，负面发现同样记录</a:t>
+            </a:r>
+          </a:p>
+        </p:txBody>
+      </p:sp>
+      <p:sp>
+        <p:nvSpPr>
+          <p:cNvPr id="5" name="TextBox 4"/>
+          <p:cNvSpPr txBox="1"/>
+          <p:nvPr/>
+        </p:nvSpPr>
+        <p:spPr>
+          <a:xfrm>
+            <a:off x="411480" y="5577840"/>
+            <a:ext cx="11338560" cy="822960"/>
+          </a:xfrm>
+          <a:prstGeom prst="rect">
+            <a:avLst/>
+          </a:prstGeom>
+          <a:noFill/>
+        </p:spPr>
+        <p:txBody>
+          <a:bodyPr wrap="square" anchor="t">
+            <a:spAutoFit/>
+          </a:bodyPr>
+          <a:lstStyle/>
+          <a:p>
+            <a:pPr algn="l">
+              <a:lnSpc>
+                <a:spcPct val="100000"/>
+              </a:lnSpc>
+              <a:spcAft>
+                <a:spcPts val="500"/>
+              </a:spcAft>
+            </a:pPr>
+            <a:r>
+              <a:rPr sz="1400" b="1">
+                <a:solidFill>
+                  <a:srgbClr val="1F3864"/>
+                </a:solidFill>
+                <a:latin typeface="Noto Sans CJK SC"/>
+                <a:ea typeface="Noto Sans CJK SC"/>
+              </a:rPr>
+              <a:t>对本项目的启示：</a:t>
+            </a:r>
+            <a:r>
+              <a:rPr sz="1400" b="0">
+                <a:solidFill>
+                  <a:srgbClr val="595959"/>
+                </a:solidFill>
+                <a:latin typeface="Noto Sans CJK SC"/>
+                <a:ea typeface="Noto Sans CJK SC"/>
+              </a:rPr>
+              <a:t>商用化最成功的自适应自动舵（BNAAC、NAVIPILOT、PR-9000 NCT）走的都是“海况自适应 + 节能”路线，</a:t>
+            </a:r>
+          </a:p>
+          <a:p>
+            <a:pPr algn="l">
+              <a:lnSpc>
+                <a:spcPct val="100000"/>
+              </a:lnSpc>
+              <a:spcAft>
+                <a:spcPts val="500"/>
+              </a:spcAft>
+            </a:pPr>
+            <a:r>
+              <a:rPr sz="1400" b="0">
+                <a:solidFill>
+                  <a:srgbClr val="595959"/>
+                </a:solidFill>
+                <a:latin typeface="Noto Sans CJK SC"/>
+                <a:ea typeface="Noto Sans CJK SC"/>
+              </a:rPr>
+              <a:t>与本项目 ESC 寻优 + 调度域扩展的 P0/P1 建议方向一致；专利空白区（核心控制律）也提示自研算法有自主布局空间。</a:t>
+            </a:r>
+          </a:p>
+        </p:txBody>
+      </p:sp>
+    </p:spTree>
+  </p:cSld>
+  <p:clrMapOvr>
+    <a:masterClrMapping/>
+  </p:clrMapOvr>
+</p:sld>
+</file>
+
+<file path=ppt/slides/slide17.xml><?xml version="1.0" encoding="utf-8"?>
+<p:sld xmlns:a="http://schemas.openxmlformats.org/drawingml/2006/main" xmlns:p="http://schemas.openxmlformats.org/presentationml/2006/main" xmlns:r="http://schemas.openxmlformats.org/officeDocument/2006/relationships">
+  <p:cSld>
+    <p:spTree>
+      <p:nvGrpSpPr>
+        <p:cNvPr id="1" name=""/>
+        <p:cNvGrpSpPr/>
+        <p:nvPr/>
+      </p:nvGrpSpPr>
+      <p:grpSpPr/>
+      <p:sp>
+        <p:nvSpPr>
+          <p:cNvPr id="2" name="Rectangle 1"/>
+          <p:cNvSpPr/>
+          <p:nvPr/>
+        </p:nvSpPr>
+        <p:spPr>
+          <a:xfrm>
+            <a:off x="0" y="0"/>
+            <a:ext cx="12191695" cy="841248"/>
+          </a:xfrm>
+          <a:prstGeom prst="rect">
+            <a:avLst/>
+          </a:prstGeom>
+          <a:solidFill>
+            <a:srgbClr val="1F3864"/>
+          </a:solidFill>
+          <a:ln>
+            <a:noFill/>
+          </a:ln>
+          <a:effectLst/>
+        </p:spPr>
+        <p:style>
+          <a:lnRef idx="1">
+            <a:schemeClr val="accent1"/>
+          </a:lnRef>
+          <a:fillRef idx="3">
+            <a:schemeClr val="accent1"/>
+          </a:fillRef>
+          <a:effectRef idx="2">
+            <a:schemeClr val="accent1"/>
+          </a:effectRef>
+          <a:fontRef idx="minor">
+            <a:schemeClr val="lt1"/>
+          </a:fontRef>
+        </p:style>
+        <p:txBody>
+          <a:bodyPr rtlCol="0" anchor="ctr" lIns="411480" tIns="91440" wrap="square"/>
+          <a:lstStyle/>
+          <a:p>
+            <a:pPr algn="ctr"/>
+            <a:r>
+              <a:rPr sz="2600" b="1">
+                <a:solidFill>
+                  <a:srgbClr val="FFFFFF"/>
+                </a:solidFill>
+                <a:latin typeface="Noto Sans CJK SC"/>
+                <a:ea typeface="Noto Sans CJK SC"/>
+              </a:rPr>
+              <a:t>对本项目的分层建议（P0–P3）</a:t>
+            </a:r>
+          </a:p>
+          <a:p>
+            <a:r>
+              <a:rPr sz="1200" b="0">
+                <a:solidFill>
+                  <a:srgbClr val="BDD0EA"/>
+                </a:solidFill>
+                <a:latin typeface="Noto Sans CJK SC"/>
+                <a:ea typeface="Noto Sans CJK SC"/>
+              </a:rPr>
+              <a:t>第 14 章 · 按投入产出排序</a:t>
+            </a:r>
+          </a:p>
+        </p:txBody>
+      </p:sp>
+      <p:sp>
+        <p:nvSpPr>
+          <p:cNvPr id="3" name="TextBox 2"/>
+          <p:cNvSpPr txBox="1"/>
+          <p:nvPr/>
+        </p:nvSpPr>
+        <p:spPr>
+          <a:xfrm>
+            <a:off x="11277295" y="6473952"/>
+            <a:ext cx="731520" cy="320040"/>
+          </a:xfrm>
+          <a:prstGeom prst="rect">
+            <a:avLst/>
+          </a:prstGeom>
+          <a:noFill/>
+        </p:spPr>
+        <p:txBody>
+          <a:bodyPr wrap="square" anchor="t">
+            <a:spAutoFit/>
+          </a:bodyPr>
+          <a:lstStyle/>
+          <a:p>
+            <a:pPr algn="r">
+              <a:lnSpc>
+                <a:spcPct val="100000"/>
+              </a:lnSpc>
+              <a:spcAft>
+                <a:spcPts val="600"/>
+              </a:spcAft>
+            </a:pPr>
+            <a:r>
+              <a:rPr sz="1100" b="0">
+                <a:solidFill>
+                  <a:srgbClr val="595959"/>
+                </a:solidFill>
+                <a:latin typeface="Noto Sans CJK SC"/>
+                <a:ea typeface="Noto Sans CJK SC"/>
+              </a:rPr>
+              <a:t>17</a:t>
             </a:r>
           </a:p>
         </p:txBody>
@@ -7976,7 +9401,7 @@
 </p:sld>
 </file>
 
-<file path=ppt/slides/slide16.xml><?xml version="1.0" encoding="utf-8"?>
+<file path=ppt/slides/slide18.xml><?xml version="1.0" encoding="utf-8"?>
 <p:sld xmlns:a="http://schemas.openxmlformats.org/drawingml/2006/main" xmlns:p="http://schemas.openxmlformats.org/presentationml/2006/main" xmlns:r="http://schemas.openxmlformats.org/officeDocument/2006/relationships">
   <p:cSld>
     <p:spTree>
